--- a/assets/introduction-to-bobology.pptx
+++ b/assets/introduction-to-bobology.pptx
@@ -2588,7 +2588,7 @@
                 <a:ea typeface="Georgia" pitchFamily="34" charset="-122"/>
                 <a:cs typeface="Georgia" pitchFamily="34" charset="-120"/>
               </a:rPr>
-              <a:t>Introduction to Bobbology</a:t>
+              <a:t>Introduction to Bobology</a:t>
             </a:r>
             <a:endParaRPr lang="en-US" sz="6000" dirty="0"/>
           </a:p>
@@ -3460,7 +3460,7 @@
                 <a:ea typeface="Calibri" pitchFamily="34" charset="-122"/>
                 <a:cs typeface="Calibri" pitchFamily="34" charset="-120"/>
               </a:rPr>
-              <a:t>If an Eko seems to remember you between chats, something else is doing the remembering — usually a "memory" feature in the app that writes notes in the background.</a:t>
+              <a:t>If an Eko seems to remember you between chats, the app is doing the remembering. It is usually a "memory" feature that writes notes in the background.</a:t>
             </a:r>
             <a:endParaRPr lang="en-US" sz="1800" dirty="0"/>
           </a:p>
@@ -3768,7 +3768,7 @@
                 <a:ea typeface="Calibri" pitchFamily="34" charset="-122"/>
                 <a:cs typeface="Calibri" pitchFamily="34" charset="-120"/>
               </a:rPr>
-              <a:t>If an app offers to "remember" something, check what it actually wrote down. Those notes are now your file — you can edit them, delete them, or correct them.</a:t>
+              <a:t>If an app offers to "remember" something, check what it actually wrote down. Those notes are now your file: you can edit them, delete them, or correct them.</a:t>
             </a:r>
             <a:endParaRPr lang="en-US" sz="1800" dirty="0"/>
           </a:p>
@@ -4152,7 +4152,7 @@
                 <a:ea typeface="Georgia" pitchFamily="34" charset="-122"/>
                 <a:cs typeface="Georgia" pitchFamily="34" charset="-120"/>
               </a:rPr>
-              <a:t>a person — not the AI — does the last step.</a:t>
+              <a:t>a person, not the AI, does the last step.</a:t>
             </a:r>
             <a:endParaRPr lang="en-US" sz="3200" dirty="0"/>
           </a:p>
@@ -6171,7 +6171,7 @@
                 <a:ea typeface="Calibri" pitchFamily="34" charset="-122"/>
                 <a:cs typeface="Calibri" pitchFamily="34" charset="-120"/>
               </a:rPr>
-              <a:t>This guide explains how to use AI tools well — for school, work, or anything that matters.</a:t>
+              <a:t>This guide explains how to use AI tools well, for school, work, or anything that matters.</a:t>
             </a:r>
             <a:endParaRPr lang="en-US" sz="1800" dirty="0"/>
           </a:p>
@@ -6243,7 +6243,7 @@
                 <a:ea typeface="Calibri" pitchFamily="34" charset="-122"/>
                 <a:cs typeface="Calibri" pitchFamily="34" charset="-120"/>
               </a:rPr>
-              <a:t>The fancy words each name one specific thing — that lets the rest of the guide stay short.</a:t>
+              <a:t>The fancy words each name one specific thing: that lets the rest of the guide stay short.</a:t>
             </a:r>
             <a:endParaRPr lang="en-US" sz="1800" dirty="0"/>
           </a:p>
@@ -7330,7 +7330,7 @@
                           <a:ea typeface="Calibri" pitchFamily="34" charset="-122"/>
                           <a:cs typeface="Calibri" pitchFamily="34" charset="-120"/>
                         </a:rPr>
-                        <a:t>A specific tool the AI can use — sending an email, saving a file, searching Google, running code. Daemons are what turn words into real actions.</a:t>
+                        <a:t>A specific tool the AI can use: sending an email, saving a file, searching Google, running code. Daemons are what turn words into real actions.</a:t>
                       </a:r>
                       <a:endParaRPr lang="en-US" sz="1400" dirty="0">
                         <a:latin typeface="Calibri" charset="0"/>
@@ -7572,7 +7572,7 @@
                 <a:ea typeface="Calibri" pitchFamily="34" charset="-122"/>
                 <a:cs typeface="Calibri" pitchFamily="34" charset="-120"/>
               </a:rPr>
-              <a:t>People say "the AI did X." Usually one specific part did X — and naming which one tells you where to fix it.</a:t>
+              <a:t>People say "the AI did X." Usually one specific part did X, and naming which one tells you where to fix it.</a:t>
             </a:r>
             <a:endParaRPr lang="en-US" sz="1700" dirty="0"/>
           </a:p>
@@ -8036,7 +8036,7 @@
                 <a:ea typeface="Calibri" pitchFamily="34" charset="-122"/>
                 <a:cs typeface="Calibri" pitchFamily="34" charset="-120"/>
               </a:rPr>
-              <a:t>It is very good at the trick. It is not thinking the way a person thinks. It has no goals.</a:t>
+              <a:t>The Eko is very good at the trick, but it is not actually thinking.</a:t>
             </a:r>
             <a:endParaRPr lang="en-US" sz="1800" dirty="0"/>
           </a:p>
@@ -8060,7 +8060,7 @@
                 <a:ea typeface="Calibri" pitchFamily="34" charset="-122"/>
                 <a:cs typeface="Calibri" pitchFamily="34" charset="-120"/>
               </a:rPr>
-              <a:t>It does not know which of its answers are right and which are wrong.</a:t>
+              <a:t>It has no goals, and it does not know which of its answers are right.</a:t>
             </a:r>
             <a:endParaRPr lang="en-US" sz="1800" dirty="0"/>
           </a:p>
@@ -8084,7 +8084,7 @@
                 <a:ea typeface="Calibri" pitchFamily="34" charset="-122"/>
                 <a:cs typeface="Calibri" pitchFamily="34" charset="-120"/>
               </a:rPr>
-              <a:t>It sounds the same when it is right and when it is wrong.</a:t>
+              <a:t>And it sounds the same when it is right and when it is wrong.</a:t>
             </a:r>
             <a:endParaRPr lang="en-US" sz="1800" dirty="0"/>
           </a:p>
@@ -8316,7 +8316,7 @@
                 <a:ea typeface="Calibri" pitchFamily="34" charset="-122"/>
                 <a:cs typeface="Calibri" pitchFamily="34" charset="-120"/>
               </a:rPr>
-              <a:t>In June 2023, two New York lawyers filed a legal brief in federal court. </a:t>
+              <a:t xml:space="preserve">In June 2023, two New York lawyers filed a legal brief in federal court. </a:t>
             </a:r>
             <a:pPr indent="0" marL="0">
               <a:spcAft>
@@ -8333,7 +8333,7 @@
                 <a:ea typeface="Calibri" pitchFamily="34" charset="-122"/>
                 <a:cs typeface="Calibri" pitchFamily="34" charset="-120"/>
               </a:rPr>
-              <a:t>ChatGPT wrote it. </a:t>
+              <a:t xml:space="preserve">ChatGPT wrote it. </a:t>
             </a:r>
             <a:pPr indent="0" marL="0">
               <a:spcAft>
@@ -8392,7 +8392,7 @@
                 <a:ea typeface="Calibri" pitchFamily="34" charset="-122"/>
                 <a:cs typeface="Calibri" pitchFamily="34" charset="-120"/>
               </a:rPr>
-              <a:t>None of the six cases existed. </a:t>
+              <a:t xml:space="preserve">None of the six cases existed. </a:t>
             </a:r>
             <a:pPr indent="0" marL="0">
               <a:spcAft>
@@ -8409,7 +8409,7 @@
                 <a:ea typeface="Calibri" pitchFamily="34" charset="-122"/>
                 <a:cs typeface="Calibri" pitchFamily="34" charset="-120"/>
               </a:rPr>
-              <a:t>ChatGPT had invented them — names, citations, quotes, all of it — and reported them in the same calm tone it would have used for a real case.</a:t>
+              <a:t>ChatGPT had invented them (names, citations, quotes, all of it) and reported them in the same calm tone it would have used for a real case.</a:t>
             </a:r>
             <a:endParaRPr lang="en-US" sz="1800" dirty="0"/>
           </a:p>
@@ -8448,7 +8448,7 @@
                 <a:ea typeface="Calibri" pitchFamily="34" charset="-122"/>
                 <a:cs typeface="Calibri" pitchFamily="34" charset="-120"/>
               </a:rPr>
-              <a:t>The lawyers were fined $5,000 each. </a:t>
+              <a:t xml:space="preserve">The lawyers were fined $5,000 each. </a:t>
             </a:r>
             <a:pPr indent="0" marL="0">
               <a:buNone/>
